--- a/deepdelta-demo.pptx
+++ b/deepdelta-demo.pptx
@@ -5350,7 +5350,7 @@
                 </a:solidFill>
                 <a:latin typeface="Calibri"/>
               </a:rPr>
-              <a:t>55%</a:t>
+              <a:t>19%</a:t>
             </a:r>
           </a:p>
         </p:txBody>
@@ -5385,7 +5385,7 @@
                 </a:solidFill>
                 <a:latin typeface="Calibri"/>
               </a:rPr>
-              <a:t>"Where do giant cucumbers live?"</a:t>
+              <a:t>"What's the deepest octopus ever filmed?"</a:t>
             </a:r>
           </a:p>
         </p:txBody>
@@ -5424,7 +5424,7 @@
                 </a:solidFill>
                 <a:latin typeface="Calibri"/>
               </a:rPr>
-              <a:t>— Refused to fabricate; noted no matching species</a:t>
+              <a:t>— No octopus pages in corpus; nearest hits were cephalopods</a:t>
             </a:r>
           </a:p>
           <a:p>
@@ -5456,7 +5456,7 @@
                 </a:solidFill>
                 <a:latin typeface="Calibri"/>
               </a:rPr>
-              <a:t>— 50% agreement, 30% self-confidence — low by design</a:t>
+              <a:t>— 0% agreement, 0% direct evidence — refused by design</a:t>
             </a:r>
           </a:p>
         </p:txBody>
